--- a/lecons/F5/13_F5_M1_FS02_Containerisation.pptx
+++ b/lecons/F5/13_F5_M1_FS02_Containerisation.pptx
@@ -13024,7 +13024,7 @@
               <a:buNone/>
             </a:pPr>
             <a:r>
-              <a:rPr lang="en-US" sz="4000" b="1" dirty="0">
+              <a:rPr lang="en-US" sz="3200" b="1" dirty="0">
                 <a:solidFill>
                   <a:srgbClr val="111111"/>
                 </a:solidFill>
@@ -13034,7 +13034,7 @@
               </a:rPr>
               <a:t>Topic: Managing Resources for Development through Economic Activities</a:t>
             </a:r>
-            <a:endParaRPr lang="en-US" sz="4000" dirty="0"/>
+            <a:endParaRPr lang="en-US" sz="3200" dirty="0"/>
           </a:p>
           <a:p>
             <a:pPr algn="l" indent="0" marL="0">
@@ -13044,7 +13044,7 @@
               <a:buNone/>
             </a:pPr>
             <a:r>
-              <a:rPr lang="en-US" sz="4000" b="1" dirty="0">
+              <a:rPr lang="en-US" sz="3200" b="1" dirty="0">
                 <a:solidFill>
                   <a:srgbClr val="111111"/>
                 </a:solidFill>
@@ -13054,7 +13054,7 @@
               </a:rPr>
               <a:t>Sub-topic: World Communication</a:t>
             </a:r>
-            <a:endParaRPr lang="en-US" sz="4000" dirty="0"/>
+            <a:endParaRPr lang="en-US" sz="3200" dirty="0"/>
           </a:p>
           <a:p>
             <a:pPr algn="l" indent="0" marL="0">
@@ -13064,7 +13064,7 @@
               <a:buNone/>
             </a:pPr>
             <a:r>
-              <a:rPr lang="en-US" sz="4000" b="1" dirty="0">
+              <a:rPr lang="en-US" sz="3200" b="1" dirty="0">
                 <a:solidFill>
                   <a:srgbClr val="990011"/>
                 </a:solidFill>
@@ -13074,7 +13074,7 @@
               </a:rPr>
               <a:t>Further Study 2: Containerisation</a:t>
             </a:r>
-            <a:endParaRPr lang="en-US" sz="4000" dirty="0"/>
+            <a:endParaRPr lang="en-US" sz="3200" dirty="0"/>
           </a:p>
         </p:txBody>
       </p:sp>

--- a/lecons/F5/13_F5_M1_FS02_Containerisation.pptx
+++ b/lecons/F5/13_F5_M1_FS02_Containerisation.pptx
@@ -3192,7 +3192,7 @@
           <a:p>
             <a:r>
               <a:rPr lang="en-US" dirty="0"/>
-              <a:t>Let us copy Advantages and Disadvantages. Containerisation has the following advantages and disadvantages. On this slide we have Advantages and Disadvantages. Write each point on a new line, with the key term first, and explain it in your own words when we revise. When you finish, we go to the next slide.</a:t>
+              <a:t>Let us copy Advantages. Containerisation has the following advantages. On this slide we have Lower costs, Less theft and damage and Time saved. Write each point on a new line, with the key term first, and explain it in your own words when we revise.</a:t>
             </a:r>
             <a:endParaRPr lang="en-US" dirty="0"/>
           </a:p>
@@ -3280,7 +3280,7 @@
           <a:p>
             <a:r>
               <a:rPr lang="en-US" dirty="0"/>
-              <a:t>We continue with Advantages and Disadvantages. On this slide we have Cameroon. Write each point on a new line, with the key term first, and explain it in your own words when we revise.</a:t>
+              <a:t>Let us copy Disadvantages. Containerisation has the following disadvantages. On this slide we have Costly ports and Fewer dock jobs. Write each point on a new line, with the key term first, and explain it in your own words when we revise.</a:t>
             </a:r>
             <a:endParaRPr lang="en-US" dirty="0"/>
           </a:p>
@@ -13992,7 +13992,7 @@
         <p:spPr>
           <a:xfrm>
             <a:off x="0" y="658368"/>
-            <a:ext cx="2468880" cy="5833872"/>
+            <a:ext cx="1463040" cy="5833872"/>
           </a:xfrm>
           <a:prstGeom prst="rect">
             <a:avLst/>
@@ -14007,8 +14007,8 @@
         </p:nvSpPr>
         <p:spPr>
           <a:xfrm>
-            <a:off x="2697480" y="1005840"/>
-            <a:ext cx="9174175" cy="731520"/>
+            <a:off x="1691640" y="1005840"/>
+            <a:ext cx="10180015" cy="731520"/>
           </a:xfrm>
           <a:prstGeom prst="rect">
             <a:avLst/>
@@ -14048,8 +14048,47 @@
         </p:nvSpPr>
         <p:spPr>
           <a:xfrm>
-            <a:off x="2697480" y="1783080"/>
-            <a:ext cx="9174175" cy="4663440"/>
+            <a:off x="1691640" y="1737360"/>
+            <a:ext cx="10180015" cy="457200"/>
+          </a:xfrm>
+          <a:prstGeom prst="rect">
+            <a:avLst/>
+          </a:prstGeom>
+          <a:noFill/>
+          <a:ln/>
+        </p:spPr>
+        <p:txBody>
+          <a:bodyPr wrap="square" lIns="0" tIns="0" rIns="0" bIns="0" rtlCol="0" anchor="ctr"/>
+          <a:lstStyle/>
+          <a:p>
+            <a:pPr algn="l" indent="0" marL="0">
+              <a:buNone/>
+            </a:pPr>
+            <a:r>
+              <a:rPr lang="en-US" sz="3200" b="1" dirty="0">
+                <a:solidFill>
+                  <a:srgbClr val="990011"/>
+                </a:solidFill>
+                <a:latin typeface="Times New Roman" pitchFamily="34" charset="0"/>
+                <a:ea typeface="Times New Roman" pitchFamily="34" charset="-122"/>
+                <a:cs typeface="Times New Roman" pitchFamily="34" charset="-120"/>
+              </a:rPr>
+              <a:t>A) Advantages</a:t>
+            </a:r>
+            <a:endParaRPr lang="en-US" sz="3200" dirty="0"/>
+          </a:p>
+        </p:txBody>
+      </p:sp>
+      <p:sp>
+        <p:nvSpPr>
+          <p:cNvPr id="6" name="Text 3"/>
+          <p:cNvSpPr/>
+          <p:nvPr/>
+        </p:nvSpPr>
+        <p:spPr>
+          <a:xfrm>
+            <a:off x="1691640" y="2240280"/>
+            <a:ext cx="10180015" cy="4206240"/>
           </a:xfrm>
           <a:prstGeom prst="rect">
             <a:avLst/>
@@ -14076,7 +14115,7 @@
                 <a:ea typeface="Times New Roman" pitchFamily="34" charset="-122"/>
                 <a:cs typeface="Times New Roman" pitchFamily="34" charset="-120"/>
               </a:rPr>
-              <a:t>Containerisation has the following advantages and disadvantages:</a:t>
+              <a:t>Containerisation has the following advantages:</a:t>
             </a:r>
             <a:endParaRPr lang="en-US" sz="4000" dirty="0"/>
           </a:p>
@@ -14096,7 +14135,7 @@
                 <a:ea typeface="Times New Roman" pitchFamily="34" charset="-122"/>
                 <a:cs typeface="Times New Roman" pitchFamily="34" charset="-120"/>
               </a:rPr>
-              <a:t>Advantages: </a:t>
+              <a:t>Lower costs: </a:t>
             </a:r>
             <a:pPr algn="l" indent="0" marL="0">
               <a:spcAft>
@@ -14113,7 +14152,7 @@
                 <a:ea typeface="Times New Roman" pitchFamily="34" charset="-122"/>
                 <a:cs typeface="Times New Roman" pitchFamily="34" charset="-120"/>
               </a:rPr>
-              <a:t>It lowers costs, reduces theft and damage, and saves time.</a:t>
+              <a:t>Loading is cheaper and faster.</a:t>
             </a:r>
             <a:endParaRPr lang="en-US" sz="4000" dirty="0"/>
           </a:p>
@@ -14133,7 +14172,7 @@
                 <a:ea typeface="Times New Roman" pitchFamily="34" charset="-122"/>
                 <a:cs typeface="Times New Roman" pitchFamily="34" charset="-120"/>
               </a:rPr>
-              <a:t>Disadvantages: </a:t>
+              <a:t>Less theft and damage: </a:t>
             </a:r>
             <a:pPr algn="l" indent="0" marL="0">
               <a:spcAft>
@@ -14150,7 +14189,44 @@
                 <a:ea typeface="Times New Roman" pitchFamily="34" charset="-122"/>
                 <a:cs typeface="Times New Roman" pitchFamily="34" charset="-120"/>
               </a:rPr>
-              <a:t>It needs costly deep ports and cranes and reduces dock jobs.</a:t>
+              <a:t>Goods are locked in steel boxes.</a:t>
+            </a:r>
+            <a:endParaRPr lang="en-US" sz="4000" dirty="0"/>
+          </a:p>
+          <a:p>
+            <a:pPr algn="l" indent="0" marL="0">
+              <a:spcAft>
+                <a:spcPts val="800"/>
+              </a:spcAft>
+              <a:buNone/>
+            </a:pPr>
+            <a:r>
+              <a:rPr lang="en-US" sz="4000" b="1" dirty="0">
+                <a:solidFill>
+                  <a:srgbClr val="111111"/>
+                </a:solidFill>
+                <a:latin typeface="Times New Roman" pitchFamily="34" charset="0"/>
+                <a:ea typeface="Times New Roman" pitchFamily="34" charset="-122"/>
+                <a:cs typeface="Times New Roman" pitchFamily="34" charset="-120"/>
+              </a:rPr>
+              <a:t>Time saved: </a:t>
+            </a:r>
+            <a:pPr algn="l" indent="0" marL="0">
+              <a:spcAft>
+                <a:spcPts val="800"/>
+              </a:spcAft>
+              <a:buNone/>
+            </a:pPr>
+            <a:r>
+              <a:rPr lang="en-US" sz="4000" dirty="0">
+                <a:solidFill>
+                  <a:srgbClr val="111111"/>
+                </a:solidFill>
+                <a:latin typeface="Times New Roman" pitchFamily="34" charset="0"/>
+                <a:ea typeface="Times New Roman" pitchFamily="34" charset="-122"/>
+                <a:cs typeface="Times New Roman" pitchFamily="34" charset="-120"/>
+              </a:rPr>
+              <a:t>Ships stay a short time in port.</a:t>
             </a:r>
             <a:endParaRPr lang="en-US" sz="4000" dirty="0"/>
           </a:p>
@@ -14285,7 +14361,7 @@
         <p:spPr>
           <a:xfrm>
             <a:off x="0" y="658368"/>
-            <a:ext cx="5120640" cy="5833872"/>
+            <a:ext cx="2468880" cy="5833872"/>
           </a:xfrm>
           <a:prstGeom prst="rect">
             <a:avLst/>
@@ -14300,8 +14376,8 @@
         </p:nvSpPr>
         <p:spPr>
           <a:xfrm>
-            <a:off x="5349240" y="1005840"/>
-            <a:ext cx="6522415" cy="731520"/>
+            <a:off x="2697480" y="1005840"/>
+            <a:ext cx="9174175" cy="731520"/>
           </a:xfrm>
           <a:prstGeom prst="rect">
             <a:avLst/>
@@ -14327,7 +14403,7 @@
                 <a:ea typeface="Times New Roman" pitchFamily="34" charset="-122"/>
                 <a:cs typeface="Times New Roman" pitchFamily="34" charset="-120"/>
               </a:rPr>
-              <a:t>2. Advantages and Disadvantages (continued)</a:t>
+              <a:t>2. Advantages and Disadvantages</a:t>
             </a:r>
             <a:endParaRPr lang="en-US" sz="3600" dirty="0"/>
           </a:p>
@@ -14341,8 +14417,47 @@
         </p:nvSpPr>
         <p:spPr>
           <a:xfrm>
-            <a:off x="5349240" y="1783080"/>
-            <a:ext cx="6522415" cy="4663440"/>
+            <a:off x="2697480" y="1737360"/>
+            <a:ext cx="9174175" cy="457200"/>
+          </a:xfrm>
+          <a:prstGeom prst="rect">
+            <a:avLst/>
+          </a:prstGeom>
+          <a:noFill/>
+          <a:ln/>
+        </p:spPr>
+        <p:txBody>
+          <a:bodyPr wrap="square" lIns="0" tIns="0" rIns="0" bIns="0" rtlCol="0" anchor="ctr"/>
+          <a:lstStyle/>
+          <a:p>
+            <a:pPr algn="l" indent="0" marL="0">
+              <a:buNone/>
+            </a:pPr>
+            <a:r>
+              <a:rPr lang="en-US" sz="3200" b="1" dirty="0">
+                <a:solidFill>
+                  <a:srgbClr val="990011"/>
+                </a:solidFill>
+                <a:latin typeface="Times New Roman" pitchFamily="34" charset="0"/>
+                <a:ea typeface="Times New Roman" pitchFamily="34" charset="-122"/>
+                <a:cs typeface="Times New Roman" pitchFamily="34" charset="-120"/>
+              </a:rPr>
+              <a:t>B) Disadvantages</a:t>
+            </a:r>
+            <a:endParaRPr lang="en-US" sz="3200" dirty="0"/>
+          </a:p>
+        </p:txBody>
+      </p:sp>
+      <p:sp>
+        <p:nvSpPr>
+          <p:cNvPr id="6" name="Text 3"/>
+          <p:cNvSpPr/>
+          <p:nvPr/>
+        </p:nvSpPr>
+        <p:spPr>
+          <a:xfrm>
+            <a:off x="2697480" y="2240280"/>
+            <a:ext cx="9174175" cy="4206240"/>
           </a:xfrm>
           <a:prstGeom prst="rect">
             <a:avLst/>
@@ -14361,7 +14476,7 @@
               <a:buNone/>
             </a:pPr>
             <a:r>
-              <a:rPr lang="en-US" sz="4000" b="1" dirty="0">
+              <a:rPr lang="en-US" sz="4000" i="1" dirty="0">
                 <a:solidFill>
                   <a:srgbClr val="111111"/>
                 </a:solidFill>
@@ -14369,8 +14484,11 @@
                 <a:ea typeface="Times New Roman" pitchFamily="34" charset="-122"/>
                 <a:cs typeface="Times New Roman" pitchFamily="34" charset="-120"/>
               </a:rPr>
-              <a:t>Cameroon: </a:t>
-            </a:r>
+              <a:t>Containerisation has the following disadvantages:</a:t>
+            </a:r>
+            <a:endParaRPr lang="en-US" sz="4000" dirty="0"/>
+          </a:p>
+          <a:p>
             <a:pPr algn="l" indent="0" marL="0">
               <a:spcAft>
                 <a:spcPts val="800"/>
@@ -14378,7 +14496,7 @@
               <a:buNone/>
             </a:pPr>
             <a:r>
-              <a:rPr lang="en-US" sz="4000" dirty="0">
+              <a:rPr lang="en-US" sz="4000" b="1" dirty="0">
                 <a:solidFill>
                   <a:srgbClr val="111111"/>
                 </a:solidFill>
@@ -14386,7 +14504,61 @@
                 <a:ea typeface="Times New Roman" pitchFamily="34" charset="-122"/>
                 <a:cs typeface="Times New Roman" pitchFamily="34" charset="-120"/>
               </a:rPr>
-              <a:t>Douala and Kribi have container terminals.</a:t>
+              <a:t>Costly ports: </a:t>
+            </a:r>
+            <a:pPr algn="l" indent="0" marL="0">
+              <a:spcAft>
+                <a:spcPts val="800"/>
+              </a:spcAft>
+              <a:buNone/>
+            </a:pPr>
+            <a:r>
+              <a:rPr lang="en-US" sz="4000" dirty="0">
+                <a:solidFill>
+                  <a:srgbClr val="111111"/>
+                </a:solidFill>
+                <a:latin typeface="Times New Roman" pitchFamily="34" charset="0"/>
+                <a:ea typeface="Times New Roman" pitchFamily="34" charset="-122"/>
+                <a:cs typeface="Times New Roman" pitchFamily="34" charset="-120"/>
+              </a:rPr>
+              <a:t>Deep ports and big cranes are needed, as at Douala and Kribi.</a:t>
+            </a:r>
+            <a:endParaRPr lang="en-US" sz="4000" dirty="0"/>
+          </a:p>
+          <a:p>
+            <a:pPr algn="l" indent="0" marL="0">
+              <a:spcAft>
+                <a:spcPts val="800"/>
+              </a:spcAft>
+              <a:buNone/>
+            </a:pPr>
+            <a:r>
+              <a:rPr lang="en-US" sz="4000" b="1" dirty="0">
+                <a:solidFill>
+                  <a:srgbClr val="111111"/>
+                </a:solidFill>
+                <a:latin typeface="Times New Roman" pitchFamily="34" charset="0"/>
+                <a:ea typeface="Times New Roman" pitchFamily="34" charset="-122"/>
+                <a:cs typeface="Times New Roman" pitchFamily="34" charset="-120"/>
+              </a:rPr>
+              <a:t>Fewer dock jobs: </a:t>
+            </a:r>
+            <a:pPr algn="l" indent="0" marL="0">
+              <a:spcAft>
+                <a:spcPts val="800"/>
+              </a:spcAft>
+              <a:buNone/>
+            </a:pPr>
+            <a:r>
+              <a:rPr lang="en-US" sz="4000" dirty="0">
+                <a:solidFill>
+                  <a:srgbClr val="111111"/>
+                </a:solidFill>
+                <a:latin typeface="Times New Roman" pitchFamily="34" charset="0"/>
+                <a:ea typeface="Times New Roman" pitchFamily="34" charset="-122"/>
+                <a:cs typeface="Times New Roman" pitchFamily="34" charset="-120"/>
+              </a:rPr>
+              <a:t>Machines replace dock workers.</a:t>
             </a:r>
             <a:endParaRPr lang="en-US" sz="4000" dirty="0"/>
           </a:p>
@@ -18607,7 +18779,7 @@
                           <a:ea typeface="Calibri" pitchFamily="34" charset="-122"/>
                           <a:cs typeface="Calibri" pitchFamily="34" charset="-120"/>
                         </a:rPr>
-                        <a:t>DEFINITIONS; Reasons for Development; Advantages and Disadvantages.</a:t>
+                        <a:t>DEFINITIONS; Reasons for Development; Advantages; Disadvantages.</a:t>
                       </a:r>
                       <a:endParaRPr lang="en-US" sz="1600" dirty="0">
                         <a:latin typeface="Calibri" charset="0"/>
